--- a/powerpoint/Session1.pptx
+++ b/powerpoint/Session1.pptx
@@ -3116,13 +3116,13 @@
       <dgm:prSet presAssocID="{5D36E053-8BA1-4632-B8A3-32C572091F8D}" presName="iconRect" presStyleLbl="node1" presStyleIdx="0" presStyleCnt="2"/>
       <dgm:spPr>
         <a:blipFill>
-          <a:blip xmlns:r="http://schemas.openxmlformats.org/officeDocument/2006/relationships" r:embed="rId1">
+          <a:blip xmlns:r="http://schemas.openxmlformats.org/officeDocument/2006/relationships">
             <a:extLst>
               <a:ext uri="{28A0092B-C50C-407E-A947-70E740481C1C}">
                 <a14:useLocalDpi xmlns:a14="http://schemas.microsoft.com/office/drawing/2010/main" val="0"/>
               </a:ext>
               <a:ext uri="{96DAC541-7B7A-43D3-8B79-37D633B846F1}">
-                <asvg:svgBlip xmlns:asvg="http://schemas.microsoft.com/office/drawing/2016/SVG/main" r:embed="rId2"/>
+                <asvg:svgBlip xmlns:asvg="http://schemas.microsoft.com/office/drawing/2016/SVG/main" r:embed="rId1"/>
               </a:ext>
             </a:extLst>
           </a:blip>
@@ -3839,13 +3839,13 @@
           <a:avLst/>
         </a:prstGeom>
         <a:blipFill>
-          <a:blip xmlns:r="http://schemas.openxmlformats.org/officeDocument/2006/relationships" r:embed="rId1">
+          <a:blip xmlns:r="http://schemas.openxmlformats.org/officeDocument/2006/relationships">
             <a:extLst>
               <a:ext uri="{28A0092B-C50C-407E-A947-70E740481C1C}">
                 <a14:useLocalDpi xmlns:a14="http://schemas.microsoft.com/office/drawing/2010/main" val="0"/>
               </a:ext>
               <a:ext uri="{96DAC541-7B7A-43D3-8B79-37D633B846F1}">
-                <asvg:svgBlip xmlns:asvg="http://schemas.microsoft.com/office/drawing/2016/SVG/main" r:embed="rId2"/>
+                <asvg:svgBlip xmlns:asvg="http://schemas.microsoft.com/office/drawing/2016/SVG/main" r:embed="rId1"/>
               </a:ext>
             </a:extLst>
           </a:blip>
@@ -20027,7 +20027,7 @@
                 <a:latin typeface="Calibri"/>
                 <a:ea typeface="DejaVu Sans"/>
               </a:rPr>
-              <a:t>Trinity 2026</a:t>
+              <a:t>Michaelmas 2026</a:t>
             </a:r>
             <a:endParaRPr lang="en-GB" sz="3200" b="0" strike="noStrike" spc="-1" dirty="0">
               <a:latin typeface="Arial"/>
@@ -30185,7 +30185,7 @@
                 <a:latin typeface="Calibri"/>
                 <a:ea typeface="DejaVu Sans"/>
               </a:rPr>
-              <a:t>Trinity 2026</a:t>
+              <a:t>Michaelmas 2026</a:t>
             </a:r>
             <a:endParaRPr lang="en-GB" sz="3200" b="0" strike="noStrike" spc="-1" dirty="0">
               <a:latin typeface="Arial"/>
@@ -45001,7 +45001,7 @@
                 <a:latin typeface="Calibri"/>
                 <a:hlinkClick r:id="rId2"/>
               </a:rPr>
-              <a:t>https://github.com/BeaGM84/MSD_R_course_TT2026</a:t>
+              <a:t>https://github.com/BeaGM84/MSD_R_course_MT2026</a:t>
             </a:r>
             <a:endParaRPr lang="en-US" sz="3600" spc="-1" dirty="0">
               <a:solidFill>
@@ -45011,7 +45011,7 @@
             </a:endParaRPr>
           </a:p>
           <a:p>
-            <a:pPr marL="1080">
+            <a:pPr marL="285840" indent="-284760">
               <a:lnSpc>
                 <a:spcPct val="100000"/>
               </a:lnSpc>
@@ -45025,6 +45025,8 @@
                 <a:srgbClr val="000000"/>
               </a:buClr>
               <a:buSzPct val="80000"/>
+              <a:buFont typeface="Arial"/>
+              <a:buChar char="•"/>
             </a:pPr>
             <a:r>
               <a:rPr lang="en-US" sz="3600" b="0" strike="noStrike" spc="-1" dirty="0">
